--- a/Tcl Programming Language_Presentation-Noam-Guedalia.pptx
+++ b/Tcl Programming Language_Presentation-Noam-Guedalia.pptx
@@ -20929,6 +20929,262 @@
           </a:p>
         </p:txBody>
       </p:sp>
+      <p:pic>
+        <p:nvPicPr>
+          <p:cNvPr id="3" name="Google Shape;343;p28" descr="image.png">
+            <a:extLst>
+              <a:ext uri="{FF2B5EF4-FFF2-40B4-BE49-F238E27FC236}">
+                <a16:creationId xmlns:a16="http://schemas.microsoft.com/office/drawing/2014/main" id="{D2A8560B-DCBE-6083-3C11-FD073422A2BD}"/>
+              </a:ext>
+            </a:extLst>
+          </p:cNvPr>
+          <p:cNvPicPr preferRelativeResize="0"/>
+          <p:nvPr/>
+        </p:nvPicPr>
+        <p:blipFill rotWithShape="1">
+          <a:blip r:embed="rId10">
+            <a:alphaModFix/>
+          </a:blip>
+          <a:srcRect/>
+          <a:stretch/>
+        </p:blipFill>
+        <p:spPr>
+          <a:xfrm>
+            <a:off x="11491912" y="5488942"/>
+            <a:ext cx="142875" cy="247650"/>
+          </a:xfrm>
+          <a:prstGeom prst="rect">
+            <a:avLst/>
+          </a:prstGeom>
+          <a:noFill/>
+          <a:ln>
+            <a:noFill/>
+          </a:ln>
+        </p:spPr>
+      </p:pic>
+      <p:pic>
+        <p:nvPicPr>
+          <p:cNvPr id="5" name="Google Shape;343;p28" descr="image.png">
+            <a:extLst>
+              <a:ext uri="{FF2B5EF4-FFF2-40B4-BE49-F238E27FC236}">
+                <a16:creationId xmlns:a16="http://schemas.microsoft.com/office/drawing/2014/main" id="{723571E6-B054-9454-FF18-2A570BA4E760}"/>
+              </a:ext>
+            </a:extLst>
+          </p:cNvPr>
+          <p:cNvPicPr preferRelativeResize="0"/>
+          <p:nvPr/>
+        </p:nvPicPr>
+        <p:blipFill rotWithShape="1">
+          <a:blip r:embed="rId10">
+            <a:alphaModFix/>
+          </a:blip>
+          <a:srcRect/>
+          <a:stretch/>
+        </p:blipFill>
+        <p:spPr>
+          <a:xfrm>
+            <a:off x="11520487" y="5925821"/>
+            <a:ext cx="142875" cy="247650"/>
+          </a:xfrm>
+          <a:prstGeom prst="rect">
+            <a:avLst/>
+          </a:prstGeom>
+          <a:noFill/>
+          <a:ln>
+            <a:noFill/>
+          </a:ln>
+        </p:spPr>
+      </p:pic>
+      <p:sp>
+        <p:nvSpPr>
+          <p:cNvPr id="7" name="Google Shape;339;p28">
+            <a:extLst>
+              <a:ext uri="{FF2B5EF4-FFF2-40B4-BE49-F238E27FC236}">
+                <a16:creationId xmlns:a16="http://schemas.microsoft.com/office/drawing/2014/main" id="{FE38E841-59C2-AC62-6078-7E739643CCCA}"/>
+              </a:ext>
+            </a:extLst>
+          </p:cNvPr>
+          <p:cNvSpPr txBox="1"/>
+          <p:nvPr/>
+        </p:nvSpPr>
+        <p:spPr>
+          <a:xfrm>
+            <a:off x="604647" y="5321362"/>
+            <a:ext cx="10715625" cy="335160"/>
+          </a:xfrm>
+          <a:prstGeom prst="rect">
+            <a:avLst/>
+          </a:prstGeom>
+          <a:noFill/>
+          <a:ln>
+            <a:noFill/>
+          </a:ln>
+        </p:spPr>
+        <p:txBody>
+          <a:bodyPr spcFirstLastPara="1" wrap="square" lIns="0" tIns="0" rIns="0" bIns="0" anchor="t" anchorCtr="0">
+            <a:noAutofit/>
+          </a:bodyPr>
+          <a:lstStyle/>
+          <a:p>
+            <a:pPr marL="0" marR="0" lvl="0" indent="0" algn="r" rtl="1">
+              <a:lnSpc>
+                <a:spcPct val="160000"/>
+              </a:lnSpc>
+              <a:spcBef>
+                <a:spcPts val="0"/>
+              </a:spcBef>
+              <a:spcAft>
+                <a:spcPts val="0"/>
+              </a:spcAft>
+              <a:buNone/>
+            </a:pPr>
+            <a:r>
+              <a:rPr lang="he-IL" sz="2000" b="1" i="0" u="none" strike="noStrike" cap="none" noProof="0" dirty="0">
+                <a:solidFill>
+                  <a:srgbClr val="2C3E50"/>
+                </a:solidFill>
+                <a:latin typeface="Assistant"/>
+                <a:ea typeface="Assistant"/>
+                <a:cs typeface="Assistant"/>
+                <a:sym typeface="Assistant"/>
+              </a:rPr>
+              <a:t>ה</a:t>
+            </a:r>
+            <a:r>
+              <a:rPr lang="he-IL" sz="2000" b="1" dirty="0">
+                <a:solidFill>
+                  <a:srgbClr val="2C3E50"/>
+                </a:solidFill>
+                <a:latin typeface="Assistant"/>
+                <a:ea typeface="Assistant"/>
+                <a:cs typeface="Assistant"/>
+                <a:sym typeface="Assistant"/>
+              </a:rPr>
+              <a:t>פשטה פרוצדורלית</a:t>
+            </a:r>
+            <a:r>
+              <a:rPr lang="he-IL" sz="2000" b="1" i="0" u="none" strike="noStrike" cap="none" noProof="0" dirty="0">
+                <a:solidFill>
+                  <a:srgbClr val="2C3E50"/>
+                </a:solidFill>
+                <a:latin typeface="Assistant"/>
+                <a:ea typeface="Assistant"/>
+                <a:cs typeface="Assistant"/>
+                <a:sym typeface="Assistant"/>
+              </a:rPr>
+              <a:t>: </a:t>
+            </a:r>
+            <a:r>
+              <a:rPr lang="he-IL" sz="2000" b="0" i="0" u="none" strike="noStrike" cap="none" noProof="0" dirty="0">
+                <a:solidFill>
+                  <a:srgbClr val="2C3E50"/>
+                </a:solidFill>
+                <a:latin typeface="Assistant"/>
+                <a:ea typeface="Assistant"/>
+                <a:cs typeface="Assistant"/>
+                <a:sym typeface="Assistant"/>
+              </a:rPr>
+              <a:t>שימוש בפונקציות.</a:t>
+            </a:r>
+            <a:endParaRPr lang="he-IL" sz="1800" noProof="0" dirty="0"/>
+          </a:p>
+        </p:txBody>
+      </p:sp>
+      <p:sp>
+        <p:nvSpPr>
+          <p:cNvPr id="9" name="Google Shape;339;p28">
+            <a:extLst>
+              <a:ext uri="{FF2B5EF4-FFF2-40B4-BE49-F238E27FC236}">
+                <a16:creationId xmlns:a16="http://schemas.microsoft.com/office/drawing/2014/main" id="{C4929553-A53C-1B52-DACD-C7EBFEBFB3DE}"/>
+              </a:ext>
+            </a:extLst>
+          </p:cNvPr>
+          <p:cNvSpPr txBox="1"/>
+          <p:nvPr/>
+        </p:nvSpPr>
+        <p:spPr>
+          <a:xfrm>
+            <a:off x="628310" y="5743129"/>
+            <a:ext cx="10715625" cy="335160"/>
+          </a:xfrm>
+          <a:prstGeom prst="rect">
+            <a:avLst/>
+          </a:prstGeom>
+          <a:noFill/>
+          <a:ln>
+            <a:noFill/>
+          </a:ln>
+        </p:spPr>
+        <p:txBody>
+          <a:bodyPr spcFirstLastPara="1" wrap="square" lIns="0" tIns="0" rIns="0" bIns="0" anchor="t" anchorCtr="0">
+            <a:noAutofit/>
+          </a:bodyPr>
+          <a:lstStyle/>
+          <a:p>
+            <a:pPr marL="0" marR="0" lvl="0" indent="0" algn="r" rtl="1">
+              <a:lnSpc>
+                <a:spcPct val="160000"/>
+              </a:lnSpc>
+              <a:spcBef>
+                <a:spcPts val="0"/>
+              </a:spcBef>
+              <a:spcAft>
+                <a:spcPts val="0"/>
+              </a:spcAft>
+              <a:buNone/>
+            </a:pPr>
+            <a:r>
+              <a:rPr lang="he-IL" sz="2000" b="1" i="0" u="none" strike="noStrike" cap="none" noProof="0" dirty="0">
+                <a:solidFill>
+                  <a:srgbClr val="2C3E50"/>
+                </a:solidFill>
+                <a:latin typeface="Assistant"/>
+                <a:ea typeface="Assistant"/>
+                <a:cs typeface="Assistant"/>
+                <a:sym typeface="Assistant"/>
+              </a:rPr>
+              <a:t>הפשטת נתונים: </a:t>
+            </a:r>
+            <a:r>
+              <a:rPr lang="he-IL" sz="2000" b="0" i="0" u="none" strike="noStrike" cap="none" noProof="0" dirty="0">
+                <a:solidFill>
+                  <a:srgbClr val="2C3E50"/>
+                </a:solidFill>
+                <a:latin typeface="Assistant"/>
+                <a:ea typeface="Assistant"/>
+                <a:cs typeface="Assistant"/>
+                <a:sym typeface="Assistant"/>
+              </a:rPr>
+              <a:t>תכנות </a:t>
+            </a:r>
+            <a:r>
+              <a:rPr lang="en-US" sz="2000" b="0" i="0" u="none" strike="noStrike" cap="none" noProof="0" dirty="0">
+                <a:solidFill>
+                  <a:srgbClr val="2C3E50"/>
+                </a:solidFill>
+                <a:latin typeface="Assistant"/>
+                <a:ea typeface="Assistant"/>
+                <a:cs typeface="Assistant"/>
+                <a:sym typeface="Assistant"/>
+              </a:rPr>
+              <a:t>OOP</a:t>
+            </a:r>
+            <a:r>
+              <a:rPr lang="he-IL" sz="2000" b="0" i="0" u="none" strike="noStrike" cap="none" noProof="0" dirty="0">
+                <a:solidFill>
+                  <a:srgbClr val="2C3E50"/>
+                </a:solidFill>
+                <a:latin typeface="Assistant"/>
+                <a:ea typeface="Assistant"/>
+                <a:cs typeface="Assistant"/>
+                <a:sym typeface="Assistant"/>
+              </a:rPr>
+              <a:t>.</a:t>
+            </a:r>
+            <a:endParaRPr lang="he-IL" sz="1800" noProof="0" dirty="0"/>
+          </a:p>
+        </p:txBody>
+      </p:sp>
     </p:spTree>
   </p:cSld>
   <p:clrMapOvr>
@@ -30912,7 +31168,7 @@
         </p:blipFill>
         <p:spPr>
           <a:xfrm>
-            <a:off x="6327904" y="2559546"/>
+            <a:off x="7989926" y="2559546"/>
             <a:ext cx="3492550" cy="2739032"/>
           </a:xfrm>
           <a:prstGeom prst="rect">
@@ -30939,7 +31195,7 @@
         </p:blipFill>
         <p:spPr>
           <a:xfrm>
-            <a:off x="2549604" y="2559546"/>
+            <a:off x="4211626" y="2559546"/>
             <a:ext cx="3492550" cy="2739032"/>
           </a:xfrm>
           <a:prstGeom prst="rect">
@@ -31064,7 +31320,7 @@
         </p:blipFill>
         <p:spPr>
           <a:xfrm>
-            <a:off x="7845505" y="2854821"/>
+            <a:off x="9507527" y="2854821"/>
             <a:ext cx="457200" cy="457200"/>
           </a:xfrm>
           <a:prstGeom prst="rect">
@@ -31084,7 +31340,7 @@
         </p:nvSpPr>
         <p:spPr>
           <a:xfrm>
-            <a:off x="6550630" y="3502521"/>
+            <a:off x="8212652" y="3502521"/>
             <a:ext cx="3047099" cy="352425"/>
           </a:xfrm>
           <a:prstGeom prst="rect">
@@ -31134,7 +31390,7 @@
         </p:nvSpPr>
         <p:spPr>
           <a:xfrm>
-            <a:off x="6623180" y="3997821"/>
+            <a:off x="8285202" y="3997821"/>
             <a:ext cx="2901999" cy="670321"/>
           </a:xfrm>
           <a:prstGeom prst="rect">
@@ -31242,7 +31498,7 @@
         </p:blipFill>
         <p:spPr>
           <a:xfrm>
-            <a:off x="4067206" y="2854821"/>
+            <a:off x="5729228" y="2854821"/>
             <a:ext cx="457200" cy="457200"/>
           </a:xfrm>
           <a:prstGeom prst="rect">
@@ -31262,7 +31518,7 @@
         </p:nvSpPr>
         <p:spPr>
           <a:xfrm>
-            <a:off x="2772330" y="3502521"/>
+            <a:off x="4434352" y="3502521"/>
             <a:ext cx="3047099" cy="352425"/>
           </a:xfrm>
           <a:prstGeom prst="rect">
@@ -31312,7 +31568,7 @@
         </p:nvSpPr>
         <p:spPr>
           <a:xfrm>
-            <a:off x="2844880" y="3997821"/>
+            <a:off x="4506902" y="3997821"/>
             <a:ext cx="2901999" cy="1005482"/>
           </a:xfrm>
           <a:prstGeom prst="rect">
@@ -31494,6 +31750,188 @@
           </a:p>
         </p:txBody>
       </p:sp>
+      <p:pic>
+        <p:nvPicPr>
+          <p:cNvPr id="3" name="Google Shape;183;p20" descr="image.png">
+            <a:extLst>
+              <a:ext uri="{FF2B5EF4-FFF2-40B4-BE49-F238E27FC236}">
+                <a16:creationId xmlns:a16="http://schemas.microsoft.com/office/drawing/2014/main" id="{3C198AC2-9A4F-03C5-1873-09E802794486}"/>
+              </a:ext>
+            </a:extLst>
+          </p:cNvPr>
+          <p:cNvPicPr preferRelativeResize="0"/>
+          <p:nvPr/>
+        </p:nvPicPr>
+        <p:blipFill rotWithShape="1">
+          <a:blip r:embed="rId5">
+            <a:alphaModFix/>
+          </a:blip>
+          <a:srcRect/>
+          <a:stretch/>
+        </p:blipFill>
+        <p:spPr>
+          <a:xfrm>
+            <a:off x="390137" y="2562420"/>
+            <a:ext cx="3492550" cy="2739032"/>
+          </a:xfrm>
+          <a:prstGeom prst="rect">
+            <a:avLst/>
+          </a:prstGeom>
+          <a:noFill/>
+          <a:ln>
+            <a:noFill/>
+          </a:ln>
+        </p:spPr>
+      </p:pic>
+      <p:sp>
+        <p:nvSpPr>
+          <p:cNvPr id="7" name="Google Shape;191;p20">
+            <a:extLst>
+              <a:ext uri="{FF2B5EF4-FFF2-40B4-BE49-F238E27FC236}">
+                <a16:creationId xmlns:a16="http://schemas.microsoft.com/office/drawing/2014/main" id="{D99B2A83-2F3A-7164-B2A2-34F39D88D7FD}"/>
+              </a:ext>
+            </a:extLst>
+          </p:cNvPr>
+          <p:cNvSpPr txBox="1"/>
+          <p:nvPr/>
+        </p:nvSpPr>
+        <p:spPr>
+          <a:xfrm>
+            <a:off x="612863" y="3505395"/>
+            <a:ext cx="3047099" cy="352425"/>
+          </a:xfrm>
+          <a:prstGeom prst="rect">
+            <a:avLst/>
+          </a:prstGeom>
+          <a:noFill/>
+          <a:ln>
+            <a:noFill/>
+          </a:ln>
+        </p:spPr>
+        <p:txBody>
+          <a:bodyPr spcFirstLastPara="1" wrap="square" lIns="0" tIns="0" rIns="0" bIns="0" anchor="t" anchorCtr="0">
+            <a:noAutofit/>
+          </a:bodyPr>
+          <a:lstStyle/>
+          <a:p>
+            <a:pPr marL="0" marR="0" lvl="0" indent="0" algn="ctr" rtl="1">
+              <a:spcBef>
+                <a:spcPts val="0"/>
+              </a:spcBef>
+              <a:spcAft>
+                <a:spcPts val="0"/>
+              </a:spcAft>
+              <a:buNone/>
+            </a:pPr>
+            <a:r>
+              <a:rPr lang="en-US" sz="2100" b="1" i="0" u="none" strike="noStrike" cap="none" noProof="0" dirty="0">
+                <a:solidFill>
+                  <a:srgbClr val="003366"/>
+                </a:solidFill>
+                <a:latin typeface="Assistant"/>
+                <a:ea typeface="Assistant"/>
+                <a:cs typeface="Assistant"/>
+                <a:sym typeface="Assistant"/>
+              </a:rPr>
+              <a:t>Cost</a:t>
+            </a:r>
+            <a:endParaRPr lang="he-IL" noProof="0" dirty="0"/>
+          </a:p>
+        </p:txBody>
+      </p:sp>
+      <p:sp>
+        <p:nvSpPr>
+          <p:cNvPr id="9" name="Google Shape;192;p20">
+            <a:extLst>
+              <a:ext uri="{FF2B5EF4-FFF2-40B4-BE49-F238E27FC236}">
+                <a16:creationId xmlns:a16="http://schemas.microsoft.com/office/drawing/2014/main" id="{C0F3DDFB-2E92-AFB7-1CAD-CC45FF419298}"/>
+              </a:ext>
+            </a:extLst>
+          </p:cNvPr>
+          <p:cNvSpPr txBox="1"/>
+          <p:nvPr/>
+        </p:nvSpPr>
+        <p:spPr>
+          <a:xfrm>
+            <a:off x="685413" y="4000695"/>
+            <a:ext cx="2901999" cy="1005482"/>
+          </a:xfrm>
+          <a:prstGeom prst="rect">
+            <a:avLst/>
+          </a:prstGeom>
+          <a:noFill/>
+          <a:ln>
+            <a:noFill/>
+          </a:ln>
+        </p:spPr>
+        <p:txBody>
+          <a:bodyPr spcFirstLastPara="1" wrap="square" lIns="0" tIns="0" rIns="0" bIns="0" anchor="t" anchorCtr="0">
+            <a:noAutofit/>
+          </a:bodyPr>
+          <a:lstStyle/>
+          <a:p>
+            <a:pPr lvl="0" algn="ctr" rtl="1">
+              <a:lnSpc>
+                <a:spcPct val="160000"/>
+              </a:lnSpc>
+            </a:pPr>
+            <a:r>
+              <a:rPr lang="he-IL" sz="1600" b="1" dirty="0">
+                <a:latin typeface="Assistant" pitchFamily="2" charset="-79"/>
+                <a:cs typeface="Assistant" pitchFamily="2" charset="-79"/>
+              </a:rPr>
+              <a:t>נמוך</a:t>
+            </a:r>
+            <a:r>
+              <a:rPr lang="he-IL" sz="1600" dirty="0">
+                <a:latin typeface="Assistant" pitchFamily="2" charset="-79"/>
+                <a:cs typeface="Assistant" pitchFamily="2" charset="-79"/>
+              </a:rPr>
+              <a:t> עבור אוטומציה ושילוב מערכות בזכות קוד פשוט והידור</a:t>
+            </a:r>
+            <a:endParaRPr lang="he-IL" sz="1600" noProof="0" dirty="0">
+              <a:latin typeface="Assistant" pitchFamily="2" charset="-79"/>
+              <a:cs typeface="Assistant" pitchFamily="2" charset="-79"/>
+            </a:endParaRPr>
+          </a:p>
+        </p:txBody>
+      </p:sp>
+      <p:pic>
+        <p:nvPicPr>
+          <p:cNvPr id="11" name="גרפיקה 10" descr="מטבעות קו מיתאר">
+            <a:extLst>
+              <a:ext uri="{FF2B5EF4-FFF2-40B4-BE49-F238E27FC236}">
+                <a16:creationId xmlns:a16="http://schemas.microsoft.com/office/drawing/2014/main" id="{319540CF-B54F-3616-968D-2BB1C8157A69}"/>
+              </a:ext>
+            </a:extLst>
+          </p:cNvPr>
+          <p:cNvPicPr>
+            <a:picLocks noChangeAspect="1"/>
+          </p:cNvPicPr>
+          <p:nvPr/>
+        </p:nvPicPr>
+        <p:blipFill>
+          <a:blip>
+            <a:extLst>
+              <a:ext uri="{96DAC541-7B7A-43D3-8B79-37D633B846F1}">
+                <asvg:svgBlip xmlns:asvg="http://schemas.microsoft.com/office/drawing/2016/SVG/main" r:embed="rId8"/>
+              </a:ext>
+            </a:extLst>
+          </a:blip>
+          <a:stretch>
+            <a:fillRect/>
+          </a:stretch>
+        </p:blipFill>
+        <p:spPr>
+          <a:xfrm>
+            <a:off x="1773008" y="2723348"/>
+            <a:ext cx="755703" cy="755703"/>
+          </a:xfrm>
+          <a:prstGeom prst="rect">
+            <a:avLst/>
+          </a:prstGeom>
+        </p:spPr>
+      </p:pic>
     </p:spTree>
   </p:cSld>
   <p:clrMapOvr>
